--- a/Sixty_Barriers_RM_Deck.pptx
+++ b/Sixty_Barriers_RM_Deck.pptx
@@ -2658,7 +2658,7 @@
                 <a:ea typeface="Cambria" pitchFamily="34" charset="-122"/>
                 <a:cs typeface="Cambria" pitchFamily="34" charset="-120"/>
               </a:rPr>
-              <a:t>36</a:t>
+              <a:t>44</a:t>
             </a:r>
             <a:endParaRPr lang="en-US" sz="3200" dirty="0"/>
           </a:p>
@@ -2697,7 +2697,7 @@
                 <a:ea typeface="Calibri" pitchFamily="34" charset="-122"/>
                 <a:cs typeface="Calibri" pitchFamily="34" charset="-120"/>
               </a:rPr>
-              <a:t>documented Sev 4-5 events</a:t>
+              <a:t>event-anchored barriers</a:t>
             </a:r>
             <a:endParaRPr lang="en-US" sz="1100" dirty="0"/>
           </a:p>
@@ -2736,7 +2736,7 @@
                 <a:ea typeface="Cambria" pitchFamily="34" charset="-122"/>
                 <a:cs typeface="Cambria" pitchFamily="34" charset="-120"/>
               </a:rPr>
-              <a:t>23</a:t>
+              <a:t>14</a:t>
             </a:r>
             <a:endParaRPr lang="en-US" sz="3200" dirty="0"/>
           </a:p>
@@ -2814,7 +2814,7 @@
                 <a:ea typeface="Cambria" pitchFamily="34" charset="-122"/>
                 <a:cs typeface="Cambria" pitchFamily="34" charset="-120"/>
               </a:rPr>
-              <a:t>1,900+</a:t>
+              <a:t>1,919</a:t>
             </a:r>
             <a:endParaRPr lang="en-US" sz="3200" dirty="0"/>
           </a:p>
@@ -10291,7 +10291,7 @@
                 <a:ea typeface="Calibri" pitchFamily="34" charset="-122"/>
                 <a:cs typeface="Calibri" pitchFamily="34" charset="-120"/>
               </a:rPr>
-              <a:t>Sixty barriers, each tied to a named SM-0001 hazard, sit in requirements across six standards. Twenty-three are obligated by more than one of them.</a:t>
+              <a:t>Sixty barriers, each tied to a named SM-0001 hazard, sit in requirements across six standards. Fourteen are obligated by more than one of them.</a:t>
             </a:r>
             <a:endParaRPr lang="en-US" sz="1350" dirty="0"/>
           </a:p>
@@ -10389,7 +10389,7 @@
                 <a:ea typeface="Calibri" pitchFamily="34" charset="-122"/>
                 <a:cs typeface="Calibri" pitchFamily="34" charset="-120"/>
               </a:rPr>
-              <a:t>Roughly 1,900 documented fatalities across the cited events. The evidence is investigative-record grade, not theoretical.</a:t>
+              <a:t>1,919 documented fatalities across the distinct cited events. The evidence is investigative-record grade, not theoretical.</a:t>
             </a:r>
             <a:endParaRPr lang="en-US" sz="1350" dirty="0"/>
           </a:p>
@@ -13636,7 +13636,7 @@
                 <a:ea typeface="Calibri" pitchFamily="34" charset="-122"/>
                 <a:cs typeface="Calibri" pitchFamily="34" charset="-120"/>
               </a:rPr>
-              <a:t>of barrier failure at Severity 4 or 5. Thirty-six of the sixty carry a specific investigated event rather than an industry pattern.</a:t>
+              <a:t>of barrier failure at Severity 4 or 5. Forty-four of the sixty carry a specific investigated event rather than an industry pattern.</a:t>
             </a:r>
             <a:endParaRPr lang="en-US" sz="1250" dirty="0"/>
           </a:p>
@@ -16134,7 +16134,7 @@
                 <a:ea typeface="Cambria" pitchFamily="34" charset="-122"/>
                 <a:cs typeface="Cambria" pitchFamily="34" charset="-120"/>
               </a:rPr>
-              <a:t>36</a:t>
+              <a:t>44</a:t>
             </a:r>
             <a:endParaRPr lang="en-US" sz="4000" dirty="0"/>
           </a:p>
@@ -16278,7 +16278,7 @@
                 <a:ea typeface="Cambria" pitchFamily="34" charset="-122"/>
                 <a:cs typeface="Cambria" pitchFamily="34" charset="-120"/>
               </a:rPr>
-              <a:t>54</a:t>
+              <a:t>55</a:t>
             </a:r>
             <a:endParaRPr lang="en-US" sz="4000" dirty="0"/>
           </a:p>
@@ -16422,7 +16422,7 @@
                 <a:ea typeface="Cambria" pitchFamily="34" charset="-122"/>
                 <a:cs typeface="Cambria" pitchFamily="34" charset="-120"/>
               </a:rPr>
-              <a:t>23</a:t>
+              <a:t>14</a:t>
             </a:r>
             <a:endParaRPr lang="en-US" sz="4000" dirty="0"/>
           </a:p>
@@ -16566,7 +16566,7 @@
                 <a:ea typeface="Cambria" pitchFamily="34" charset="-122"/>
                 <a:cs typeface="Cambria" pitchFamily="34" charset="-120"/>
               </a:rPr>
-              <a:t>1,900+</a:t>
+              <a:t>1,919</a:t>
             </a:r>
             <a:endParaRPr lang="en-US" sz="4000" dirty="0"/>
           </a:p>
@@ -16744,7 +16744,7 @@
                 <a:ea typeface="Calibri" pitchFamily="34" charset="-122"/>
                 <a:cs typeface="Calibri" pitchFamily="34" charset="-120"/>
               </a:rPr>
-              <a:t>A barrier obligated independently by the system safety standard, the reliability standard and the structural integrity standard is not one discipline's preference. Twenty-three of the sixty are in that position. Of fourteen standards reviewed, only six carry normative content capable of anchoring anything at all, which means most of this discipline has no contract pathway to tailor away in the first place.</a:t>
+              <a:t>A barrier obligated independently by the system safety standard, the reliability standard and the structural integrity standard is not one discipline's preference. Fourteen of the sixty are in that position. Of fourteen standards reviewed, only six carry normative content capable of anchoring anything at all, which means most of this discipline has no contract pathway to tailor away in the first place.</a:t>
             </a:r>
             <a:endParaRPr lang="en-US" sz="1400" dirty="0"/>
           </a:p>
